--- a/Дипломная презентация Параметрика.pptx
+++ b/Дипломная презентация Параметрика.pptx
@@ -4663,7 +4663,7 @@
         </p:blipFill>
         <p:spPr>
           <a:xfrm>
-            <a:off x="4578927" y="194102"/>
+            <a:off x="4578927" y="155448"/>
             <a:ext cx="7293033" cy="6469796"/>
           </a:xfrm>
           <a:prstGeom prst="rect">
@@ -4671,6 +4671,63 @@
           </a:prstGeom>
         </p:spPr>
       </p:pic>
+      <p:sp>
+        <p:nvSpPr>
+          <p:cNvPr id="13" name="Овал 12">
+            <a:extLst>
+              <a:ext uri="{FF2B5EF4-FFF2-40B4-BE49-F238E27FC236}">
+                <a16:creationId xmlns:a16="http://schemas.microsoft.com/office/drawing/2014/main" id="{E90E5CA9-345B-3D69-B2FE-BC94E037CB5E}"/>
+              </a:ext>
+            </a:extLst>
+          </p:cNvPr>
+          <p:cNvSpPr/>
+          <p:nvPr/>
+        </p:nvSpPr>
+        <p:spPr>
+          <a:xfrm>
+            <a:off x="6912171" y="4135582"/>
+            <a:ext cx="1468582" cy="415636"/>
+          </a:xfrm>
+          <a:prstGeom prst="ellipse">
+            <a:avLst/>
+          </a:prstGeom>
+          <a:noFill/>
+          <a:ln w="38100">
+            <a:solidFill>
+              <a:srgbClr val="FF0000"/>
+            </a:solidFill>
+          </a:ln>
+        </p:spPr>
+        <p:style>
+          <a:lnRef idx="2">
+            <a:schemeClr val="accent6"/>
+          </a:lnRef>
+          <a:fillRef idx="1">
+            <a:schemeClr val="lt1"/>
+          </a:fillRef>
+          <a:effectRef idx="0">
+            <a:schemeClr val="accent6"/>
+          </a:effectRef>
+          <a:fontRef idx="minor">
+            <a:schemeClr val="dk1"/>
+          </a:fontRef>
+        </p:style>
+        <p:txBody>
+          <a:bodyPr rtlCol="0" anchor="ctr"/>
+          <a:lstStyle/>
+          <a:p>
+            <a:pPr algn="ctr"/>
+            <a:endParaRPr lang="ru-RU">
+              <a:ln>
+                <a:solidFill>
+                  <a:srgbClr val="FF0000"/>
+                </a:solidFill>
+              </a:ln>
+              <a:noFill/>
+            </a:endParaRPr>
+          </a:p>
+        </p:txBody>
+      </p:sp>
     </p:spTree>
   </p:cSld>
   <p:clrMapOvr>
